--- a/public/pitch/SIH26164-ECDAT-Idea-Presentation.pptx
+++ b/public/pitch/SIH26164-ECDAT-Idea-Presentation.pptx
@@ -5,7 +5,7 @@
     <p:sldMasterId id="2147483648" r:id="rId1"/>
   </p:sldMasterIdLst>
   <p:notesMasterIdLst>
-    <p:notesMasterId r:id="rId9"/>
+    <p:notesMasterId r:id="rId8"/>
   </p:notesMasterIdLst>
   <p:sldIdLst>
     <p:sldId id="291" r:id="rId2"/>
@@ -261,7 +261,7 @@
             <a:fld id="{C4D5ADD5-2BBC-4A94-8F86-D9013941F742}" type="datetimeFigureOut">
               <a:rPr lang="en-US"/>
               <a:pPr/>
-              <a:t>8/18/2026</a:t>
+              <a:t>8/25/2026</a:t>
             </a:fld>
             <a:endParaRPr lang="en-US"/>
           </a:p>
@@ -1534,7 +1534,7 @@
           <a:p>
             <a:fld id="{E60792E3-D524-454C-8AFD-A91972900BCB}" type="datetime1">
               <a:rPr lang="en-US" smtClean="0"/>
-              <a:t>8/18/2026</a:t>
+              <a:t>8/25/2026</a:t>
             </a:fld>
             <a:endParaRPr lang="en-US"/>
           </a:p>
@@ -1716,7 +1716,7 @@
           <a:p>
             <a:fld id="{053C3A68-6922-42D3-8905-ECC2D82A3469}" type="datetime1">
               <a:rPr lang="en-US" smtClean="0"/>
-              <a:t>8/18/2026</a:t>
+              <a:t>8/25/2026</a:t>
             </a:fld>
             <a:endParaRPr lang="en-US"/>
           </a:p>
@@ -1908,7 +1908,7 @@
           <a:p>
             <a:fld id="{CB69E9F4-7604-4950-A8B2-8ACDEDB1506E}" type="datetime1">
               <a:rPr lang="en-US" smtClean="0"/>
-              <a:t>8/18/2026</a:t>
+              <a:t>8/25/2026</a:t>
             </a:fld>
             <a:endParaRPr lang="en-US"/>
           </a:p>
@@ -2090,7 +2090,7 @@
           <a:p>
             <a:fld id="{708B7524-32A2-4C20-A58C-BC3BAA1042FC}" type="datetime1">
               <a:rPr lang="en-US" smtClean="0"/>
-              <a:t>8/18/2026</a:t>
+              <a:t>8/25/2026</a:t>
             </a:fld>
             <a:endParaRPr lang="en-US"/>
           </a:p>
@@ -2349,7 +2349,7 @@
           <a:p>
             <a:fld id="{1E994447-D6B2-43BB-A877-57F1A267B999}" type="datetime1">
               <a:rPr lang="en-US" smtClean="0"/>
-              <a:t>8/18/2026</a:t>
+              <a:t>8/25/2026</a:t>
             </a:fld>
             <a:endParaRPr lang="en-US"/>
           </a:p>
@@ -2648,7 +2648,7 @@
           <a:p>
             <a:fld id="{68920E16-BD35-483C-AA6B-346FC7E46DEA}" type="datetime1">
               <a:rPr lang="en-US" smtClean="0"/>
-              <a:t>8/18/2026</a:t>
+              <a:t>8/25/2026</a:t>
             </a:fld>
             <a:endParaRPr lang="en-US"/>
           </a:p>
@@ -3081,7 +3081,7 @@
           <a:p>
             <a:fld id="{2FEAC6F8-5103-4FC0-A69E-5C6AE6469DA8}" type="datetime1">
               <a:rPr lang="en-US" smtClean="0"/>
-              <a:t>8/18/2026</a:t>
+              <a:t>8/25/2026</a:t>
             </a:fld>
             <a:endParaRPr lang="en-US"/>
           </a:p>
@@ -3212,7 +3212,7 @@
           <a:p>
             <a:fld id="{C60C6921-0627-4C8F-83D5-0CF936D2FFDD}" type="datetime1">
               <a:rPr lang="en-US" smtClean="0"/>
-              <a:t>8/18/2026</a:t>
+              <a:t>8/25/2026</a:t>
             </a:fld>
             <a:endParaRPr lang="en-US"/>
           </a:p>
@@ -3321,7 +3321,7 @@
           <a:p>
             <a:fld id="{2FF08AD7-8103-40F8-983C-E2BA6BB9CBE0}" type="datetime1">
               <a:rPr lang="en-US" smtClean="0"/>
-              <a:t>8/18/2026</a:t>
+              <a:t>8/25/2026</a:t>
             </a:fld>
             <a:endParaRPr lang="en-US"/>
           </a:p>
@@ -3610,7 +3610,7 @@
           <a:p>
             <a:fld id="{DF8C06B4-9380-4A4D-AF49-A3596E17DAF5}" type="datetime1">
               <a:rPr lang="en-US" smtClean="0"/>
-              <a:t>8/18/2026</a:t>
+              <a:t>8/25/2026</a:t>
             </a:fld>
             <a:endParaRPr lang="en-US"/>
           </a:p>
@@ -3879,7 +3879,7 @@
           <a:p>
             <a:fld id="{EF7FDEF1-C582-4E22-9E77-D68326471F28}" type="datetime1">
               <a:rPr lang="en-US" smtClean="0"/>
-              <a:t>8/18/2026</a:t>
+              <a:t>8/25/2026</a:t>
             </a:fld>
             <a:endParaRPr lang="en-US"/>
           </a:p>
@@ -4122,7 +4122,7 @@
           <a:p>
             <a:fld id="{780A9602-A9A9-453F-AEF1-37B5837E02CD}" type="datetime1">
               <a:rPr lang="en-US" smtClean="0"/>
-              <a:t>8/18/2026</a:t>
+              <a:t>8/25/2026</a:t>
             </a:fld>
             <a:endParaRPr lang="en-US"/>
           </a:p>
@@ -5968,8 +5968,8 @@
         </p:nvSpPr>
         <p:spPr bwMode="auto">
           <a:xfrm>
-            <a:off x="-1" y="2064921"/>
-            <a:ext cx="12191999" cy="2492990"/>
+            <a:off x="307760" y="1909567"/>
+            <a:ext cx="11576477" cy="4278094"/>
           </a:xfrm>
           <a:prstGeom prst="rect">
             <a:avLst/>
@@ -6046,7 +6046,7 @@
                 <a:latin typeface="Arial" pitchFamily="34" charset="0"/>
                 <a:cs typeface="Arial" pitchFamily="34" charset="0"/>
               </a:rPr>
-              <a:t>• Three static channels: LLVM IR FIPS/RFC tables, CFG softmax model, raw-byte S-box/K[]/sigma scan</a:t>
+              <a:t>Three static channels: LLVM IR FIPS/RFC tables, CFG softmax model, raw-byte S-box/K[]/sigma scan</a:t>
             </a:r>
           </a:p>
           <a:p>
@@ -6059,7 +6059,7 @@
                 <a:latin typeface="Arial" pitchFamily="34" charset="0"/>
                 <a:cs typeface="Arial" pitchFamily="34" charset="0"/>
               </a:rPr>
-              <a:t>• Addresses NTRO need: inventory crypto in enterprise binaries without execution or evasion kits</a:t>
+              <a:t>Addresses NTRO need: inventory crypto in enterprise binaries without execution or evasion kits</a:t>
             </a:r>
           </a:p>
           <a:p>
@@ -6072,7 +6072,7 @@
                 <a:latin typeface="Arial" pitchFamily="34" charset="0"/>
                 <a:cs typeface="Arial" pitchFamily="34" charset="0"/>
               </a:rPr>
-              <a:t>• Unique: IR + AI corroboration + stripped ELF/PE/.so evidence; weak MD5/SHA-1/CRC flagged</a:t>
+              <a:t>Unique: IR + AI corroboration + stripped ELF/PE/.so evidence; weak MD5/SHA-1/CRC flagged</a:t>
             </a:r>
           </a:p>
         </p:txBody>
@@ -6384,7 +6384,7 @@
                 <a:latin typeface="Arial" pitchFamily="34" charset="0"/>
                 <a:cs typeface="Arial" pitchFamily="34" charset="0"/>
               </a:rPr>
-              <a:t>• Tech: Clang LLVM IR · TypeScript/Next.js workbench · softmax logistic regression on CFG/opcode features</a:t>
+              <a:t>Tech: Clang LLVM IR · TypeScript/Next.js workbench · softmax logistic regression on CFG/opcode features</a:t>
             </a:r>
           </a:p>
           <a:p>
@@ -6397,7 +6397,7 @@
                 <a:latin typeface="Arial" pitchFamily="34" charset="0"/>
                 <a:cs typeface="Arial" pitchFamily="34" charset="0"/>
               </a:rPr>
-              <a:t>• Flow: ingest .ll/.o/PE → IR signatures + ML + byte-scan → fused findings → JSON/HTML inventory export</a:t>
+              <a:t>Flow: ingest .ll/.o/PE → IR signatures + ML + byte-scan → fused findings → JSON/HTML inventory export</a:t>
             </a:r>
           </a:p>
         </p:txBody>
@@ -6696,7 +6696,7 @@
         <p:spPr bwMode="auto">
           <a:xfrm>
             <a:off x="609600" y="2533653"/>
-            <a:ext cx="9385300" cy="1384995"/>
+            <a:ext cx="9385300" cy="2677656"/>
           </a:xfrm>
           <a:prstGeom prst="rect">
             <a:avLst/>
@@ -6740,7 +6740,7 @@
                 <a:latin typeface="Arial" pitchFamily="34" charset="0"/>
                 <a:cs typeface="Arial" pitchFamily="34" charset="0"/>
               </a:rPr>
-              <a:t>• Feasible now: live workbench; npm run verify:all green (corpus + vendor holdout)</a:t>
+              <a:t>Feasible now: live workbench; npm run verify:all green (corpus + vendor holdout)</a:t>
             </a:r>
             <a:endParaRPr kumimoji="0" lang="en-US" sz="2800" b="0" i="0" u="none" strike="noStrike" kern="1200" cap="none" spc="0" normalizeH="0" baseline="0" noProof="0" dirty="0">
               <a:ln>
@@ -6783,7 +6783,7 @@
                 <a:latin typeface="Arial" pitchFamily="34" charset="0"/>
                 <a:cs typeface="Arial" pitchFamily="34" charset="0"/>
               </a:rPr>
-              <a:t>• Risks: stripped firmware without IR; lab-sized ML train set vs OpenSSL/libsodium wild binaries</a:t>
+              <a:t>Risks: stripped firmware without IR; lab-sized ML train set vs OpenSSL/libsodium wild binaries</a:t>
             </a:r>
           </a:p>
           <a:p>
@@ -6819,39 +6819,8 @@
                 <a:ea typeface="ＭＳ Ｐゴシック" pitchFamily="1" charset="-128"/>
                 <a:cs typeface="Arial" pitchFamily="34" charset="0"/>
               </a:rPr>
-              <a:t>• Mitigate: byte-scan on blobs today; expand vendor IR holdout; roadmap firmware/PE IR lift</a:t>
-            </a:r>
-            <a:r>
-              <a:rPr kumimoji="0" lang="en-US" sz="2800" b="0" i="0" u="none" strike="noStrike" kern="1200" cap="none" spc="0" normalizeH="0" noProof="0" dirty="0">
-                <a:ln>
-                  <a:noFill/>
-                </a:ln>
-                <a:solidFill>
-                  <a:prstClr val="black"/>
-                </a:solidFill>
-                <a:effectLst/>
-                <a:uLnTx/>
-                <a:uFillTx/>
-                <a:latin typeface="Arial" pitchFamily="34" charset="0"/>
-                <a:ea typeface="ＭＳ Ｐゴシック" pitchFamily="1" charset="-128"/>
-                <a:cs typeface="Arial" pitchFamily="34" charset="0"/>
-              </a:rPr>
-              <a:t/>
-            </a:r>
-            <a:endParaRPr kumimoji="0" lang="en-US" sz="2800" b="0" i="0" u="none" strike="noStrike" kern="1200" cap="none" spc="0" normalizeH="0" baseline="0" noProof="0" dirty="0">
-              <a:ln>
-                <a:noFill/>
-              </a:ln>
-              <a:solidFill>
-                <a:prstClr val="black"/>
-              </a:solidFill>
-              <a:effectLst/>
-              <a:uLnTx/>
-              <a:uFillTx/>
-              <a:latin typeface="Arial" pitchFamily="34" charset="0"/>
-              <a:ea typeface="ＭＳ Ｐゴシック" pitchFamily="1" charset="-128"/>
-              <a:cs typeface="Arial" pitchFamily="34" charset="0"/>
-            </a:endParaRPr>
+              <a:t>Mitigate: byte-scan on blobs today; expand vendor IR holdout; roadmap firmware/PE IR lift</a:t>
+            </a:r>
           </a:p>
         </p:txBody>
       </p:sp>
@@ -7237,7 +7206,7 @@
         <p:spPr bwMode="auto">
           <a:xfrm>
             <a:off x="609600" y="2533653"/>
-            <a:ext cx="9385300" cy="1384995"/>
+            <a:ext cx="9385300" cy="1815882"/>
           </a:xfrm>
           <a:prstGeom prst="rect">
             <a:avLst/>
@@ -7288,7 +7257,7 @@
                 <a:ea typeface="ＭＳ Ｐゴシック" pitchFamily="1" charset="-128"/>
                 <a:cs typeface="Arial" pitchFamily="34" charset="0"/>
               </a:rPr>
-              <a:t>• Audience: NTRO / enterprise AppSec — know where AES, RSA, TLS, weak hashes live in assets</a:t>
+              <a:t>Audience: NTRO / enterprise AppSec — know where AES, RSA, TLS, weak hashes live in assets</a:t>
             </a:r>
           </a:p>
           <a:p>
@@ -7317,7 +7286,7 @@
                 <a:latin typeface="Arial" pitchFamily="34" charset="0"/>
                 <a:cs typeface="Arial" pitchFamily="34" charset="0"/>
               </a:rPr>
-              <a:t>• Benefits: faster crypto audit, weak-primitive flags, SBOM-style inventory for compliance &amp; risk reduction</a:t>
+              <a:t>Benefits: faster crypto audit, weak-primitive flags, SBOM-style inventory for compliance &amp; risk reduction</a:t>
             </a:r>
           </a:p>
         </p:txBody>
@@ -7704,7 +7673,7 @@
         <p:spPr bwMode="auto">
           <a:xfrm>
             <a:off x="609600" y="2795263"/>
-            <a:ext cx="9385300" cy="523220"/>
+            <a:ext cx="9385300" cy="1384995"/>
           </a:xfrm>
           <a:prstGeom prst="rect">
             <a:avLst/>
@@ -7748,7 +7717,7 @@
                 <a:latin typeface="Arial" pitchFamily="34" charset="0"/>
                 <a:cs typeface="Arial" pitchFamily="34" charset="0"/>
               </a:rPr>
-              <a:t>• FIPS-197/180 · RFC 7748 · NIST SP 800-38D/90A · OpenSSL/libsodium tables · SIH26164 NTRO brief · live ECDAT prototype</a:t>
+              <a:t>FIPS-197/180 · RFC 7748 · NIST SP 800-38D/90A · OpenSSL/libsodium tables · SIH26164 NTRO brief · live ECDAT prototype</a:t>
             </a:r>
             <a:endParaRPr kumimoji="0" lang="en-US" sz="2800" b="0" i="0" u="none" strike="noStrike" kern="1200" cap="none" spc="0" normalizeH="0" baseline="0" noProof="0" dirty="0">
               <a:ln>
